--- a/Документы/1596_Шорсткин_Козлов_Приложение_Для_ведения_автомобильного_журнала.pptx
+++ b/Документы/1596_Шорсткин_Козлов_Приложение_Для_ведения_автомобильного_журнала.pptx
@@ -49494,49 +49494,6 @@
               </a:rPr>
               <a:t>Козлов Никита Алексеевич</a:t>
             </a:r>
-            <a:endParaRPr lang="ru-RU" altLang="x-none" sz="2000" baseline="0" dirty="0" err="1">
-              <a:latin typeface="Arial" panose="020B0604020202020204" pitchFamily="34" charset="0"/>
-              <a:cs typeface="Calibri" panose="020F0502020204030204" charset="0"/>
-            </a:endParaRPr>
-          </a:p>
-          <a:p>
-            <a:pPr defTabSz="914400" hangingPunct="1">
-              <a:lnSpc>
-                <a:spcPct val="100000"/>
-              </a:lnSpc>
-              <a:buNone/>
-              <a:tabLst>
-                <a:tab pos="0" algn="l"/>
-                <a:tab pos="914400" algn="l"/>
-                <a:tab pos="1828800" algn="l"/>
-                <a:tab pos="2743200" algn="l"/>
-              </a:tabLst>
-            </a:pPr>
-            <a:r>
-              <a:rPr lang="ru-RU" altLang="x-none" sz="2000" baseline="0" dirty="0" err="1">
-                <a:latin typeface="Arial" panose="020B0604020202020204" pitchFamily="34" charset="0"/>
-                <a:cs typeface="Calibri" panose="020F0502020204030204" charset="0"/>
-              </a:rPr>
-              <a:t>Селютин Егор Максимович</a:t>
-            </a:r>
-            <a:endParaRPr lang="ru-RU" altLang="x-none" sz="2000" baseline="0" dirty="0" err="1">
-              <a:latin typeface="Arial" panose="020B0604020202020204" pitchFamily="34" charset="0"/>
-              <a:cs typeface="Calibri" panose="020F0502020204030204" charset="0"/>
-            </a:endParaRPr>
-          </a:p>
-          <a:p>
-            <a:pPr defTabSz="914400" hangingPunct="1">
-              <a:lnSpc>
-                <a:spcPct val="100000"/>
-              </a:lnSpc>
-              <a:buNone/>
-              <a:tabLst>
-                <a:tab pos="0" algn="l"/>
-                <a:tab pos="914400" algn="l"/>
-                <a:tab pos="1828800" algn="l"/>
-                <a:tab pos="2743200" algn="l"/>
-              </a:tabLst>
-            </a:pPr>
             <a:endParaRPr lang="ru-RU" altLang="x-none" sz="2000" baseline="0" dirty="0" err="1">
               <a:latin typeface="Arial" panose="020B0604020202020204" pitchFamily="34" charset="0"/>
               <a:ea typeface="Calibri" panose="020F0502020204030204" charset="0"/>

--- a/Документы/1596_Шорсткин_Козлов_Приложение_Для_ведения_автомобильного_журнала.pptx
+++ b/Документы/1596_Шорсткин_Козлов_Приложение_Для_ведения_автомобильного_журнала.pptx
@@ -266,22 +266,6 @@
       </a:defRPr>
     </a:lvl9pPr>
   </p:defaultTextStyle>
-  <p:extLst>
-    <p:ext uri="{EFAFB233-063F-42B5-8137-9DF3F51BA10A}">
-      <p15:sldGuideLst xmlns:p15="http://schemas.microsoft.com/office/powerpoint/2012/main">
-        <p15:guide id="1" orient="horz" pos="2168" userDrawn="1">
-          <p15:clr>
-            <a:srgbClr val="A4A3A4"/>
-          </p15:clr>
-        </p15:guide>
-        <p15:guide id="2" pos="2880" userDrawn="1">
-          <p15:clr>
-            <a:srgbClr val="A4A3A4"/>
-          </p15:clr>
-        </p15:guide>
-      </p15:sldGuideLst>
-    </p:ext>
-  </p:extLst>
 </p:presentation>
 </file>
 
@@ -51049,7 +51033,7 @@
         </p:nvSpPr>
         <p:spPr>
           <a:xfrm>
-            <a:off x="4763" y="1720850"/>
+            <a:off x="7938" y="1524000"/>
             <a:ext cx="12184062" cy="584200"/>
           </a:xfrm>
           <a:prstGeom prst="rect">
@@ -51136,8 +51120,8 @@
         </p:nvSpPr>
         <p:spPr>
           <a:xfrm>
-            <a:off x="201930" y="2297430"/>
-            <a:ext cx="11817985" cy="4520565"/>
+            <a:off x="200025" y="1783080"/>
+            <a:ext cx="11817985" cy="5074920"/>
           </a:xfrm>
           <a:prstGeom prst="rect">
             <a:avLst/>

--- a/Документы/1596_Шорсткин_Козлов_Приложение_Для_ведения_автомобильного_журнала.pptx
+++ b/Документы/1596_Шорсткин_Козлов_Приложение_Для_ведения_автомобильного_журнала.pptx
@@ -266,6 +266,22 @@
       </a:defRPr>
     </a:lvl9pPr>
   </p:defaultTextStyle>
+  <p:extLst>
+    <p:ext uri="{EFAFB233-063F-42B5-8137-9DF3F51BA10A}">
+      <p15:sldGuideLst xmlns:p15="http://schemas.microsoft.com/office/powerpoint/2012/main">
+        <p15:guide id="1" orient="horz" pos="2168" userDrawn="1">
+          <p15:clr>
+            <a:srgbClr val="A4A3A4"/>
+          </p15:clr>
+        </p15:guide>
+        <p15:guide id="2" pos="2880" userDrawn="1">
+          <p15:clr>
+            <a:srgbClr val="A4A3A4"/>
+          </p15:clr>
+        </p15:guide>
+      </p15:sldGuideLst>
+    </p:ext>
+  </p:extLst>
 </p:presentation>
 </file>
 
@@ -49947,7 +49963,7 @@
       </p:pic>
       <p:pic>
         <p:nvPicPr>
-          <p:cNvPr id="21508" name="Изображение 21507"/>
+          <p:cNvPr id="2" name="Изображение 1"/>
           <p:cNvPicPr>
             <a:picLocks noChangeAspect="1"/>
           </p:cNvPicPr>
@@ -49961,16 +49977,12 @@
         </p:blipFill>
         <p:spPr>
           <a:xfrm>
-            <a:off x="2847975" y="1392238"/>
-            <a:ext cx="7108825" cy="5465762"/>
+            <a:off x="2628265" y="1448435"/>
+            <a:ext cx="6934835" cy="5333365"/>
           </a:xfrm>
           <a:prstGeom prst="rect">
             <a:avLst/>
           </a:prstGeom>
-          <a:noFill/>
-          <a:ln w="9525">
-            <a:noFill/>
-          </a:ln>
         </p:spPr>
       </p:pic>
     </p:spTree>
@@ -50085,7 +50097,7 @@
       </p:pic>
       <p:pic>
         <p:nvPicPr>
-          <p:cNvPr id="22532" name="Изображение 22531"/>
+          <p:cNvPr id="3" name="Изображение 2"/>
           <p:cNvPicPr>
             <a:picLocks noChangeAspect="1"/>
           </p:cNvPicPr>
@@ -50099,16 +50111,12 @@
         </p:blipFill>
         <p:spPr>
           <a:xfrm>
-            <a:off x="2609850" y="1398588"/>
-            <a:ext cx="7358063" cy="5268912"/>
+            <a:off x="3052445" y="1583690"/>
+            <a:ext cx="6087110" cy="5176520"/>
           </a:xfrm>
           <a:prstGeom prst="rect">
             <a:avLst/>
           </a:prstGeom>
-          <a:noFill/>
-          <a:ln w="9525">
-            <a:noFill/>
-          </a:ln>
         </p:spPr>
       </p:pic>
     </p:spTree>
@@ -53399,7 +53407,7 @@
       </p:pic>
       <p:pic>
         <p:nvPicPr>
-          <p:cNvPr id="12" name="Picture 12" descr="state_determine_diag"/>
+          <p:cNvPr id="2" name="Изображение 1" descr="state_determine_diag"/>
           <p:cNvPicPr>
             <a:picLocks noChangeAspect="1"/>
           </p:cNvPicPr>
@@ -53413,8 +53421,8 @@
         </p:blipFill>
         <p:spPr>
           <a:xfrm>
-            <a:off x="768350" y="2753995"/>
-            <a:ext cx="10889615" cy="3171825"/>
+            <a:off x="267335" y="2663825"/>
+            <a:ext cx="11733530" cy="3416935"/>
           </a:xfrm>
           <a:prstGeom prst="rect">
             <a:avLst/>
@@ -53533,7 +53541,7 @@
       </p:pic>
       <p:pic>
         <p:nvPicPr>
-          <p:cNvPr id="20484" name="Изображение 20483"/>
+          <p:cNvPr id="2" name="Изображение 1"/>
           <p:cNvPicPr>
             <a:picLocks noChangeAspect="1"/>
           </p:cNvPicPr>
@@ -53547,16 +53555,12 @@
         </p:blipFill>
         <p:spPr>
           <a:xfrm>
-            <a:off x="2730500" y="1433513"/>
-            <a:ext cx="6669088" cy="5424487"/>
+            <a:off x="2864485" y="1493520"/>
+            <a:ext cx="6463030" cy="5257165"/>
           </a:xfrm>
           <a:prstGeom prst="rect">
             <a:avLst/>
           </a:prstGeom>
-          <a:noFill/>
-          <a:ln w="9525">
-            <a:noFill/>
-          </a:ln>
         </p:spPr>
       </p:pic>
     </p:spTree>
